--- a/emotion detector.pptx
+++ b/emotion detector.pptx
@@ -6,14 +6,16 @@
   </p:sldMasterIdLst>
   <p:sldIdLst>
     <p:sldId id="256" r:id="rId2"/>
-    <p:sldId id="259" r:id="rId3"/>
-    <p:sldId id="260" r:id="rId4"/>
-    <p:sldId id="261" r:id="rId5"/>
-    <p:sldId id="257" r:id="rId6"/>
-    <p:sldId id="258" r:id="rId7"/>
-    <p:sldId id="263" r:id="rId8"/>
-    <p:sldId id="264" r:id="rId9"/>
-    <p:sldId id="262" r:id="rId10"/>
+    <p:sldId id="265" r:id="rId3"/>
+    <p:sldId id="266" r:id="rId4"/>
+    <p:sldId id="259" r:id="rId5"/>
+    <p:sldId id="260" r:id="rId6"/>
+    <p:sldId id="261" r:id="rId7"/>
+    <p:sldId id="257" r:id="rId8"/>
+    <p:sldId id="258" r:id="rId9"/>
+    <p:sldId id="263" r:id="rId10"/>
+    <p:sldId id="264" r:id="rId11"/>
+    <p:sldId id="262" r:id="rId12"/>
   </p:sldIdLst>
   <p:sldSz cx="12192000" cy="6858000"/>
   <p:notesSz cx="6858000" cy="9144000"/>
@@ -5883,568 +5885,7 @@
 </p:sld>
 </file>
 
-<file path=ppt/slides/slide2.xml><?xml version="1.0" encoding="utf-8"?>
-<p:sld xmlns:a="http://schemas.openxmlformats.org/drawingml/2006/main" xmlns:r="http://schemas.openxmlformats.org/officeDocument/2006/relationships" xmlns:p="http://schemas.openxmlformats.org/presentationml/2006/main">
-  <p:cSld>
-    <p:spTree>
-      <p:nvGrpSpPr>
-        <p:cNvPr id="1" name=""/>
-        <p:cNvGrpSpPr/>
-        <p:nvPr/>
-      </p:nvGrpSpPr>
-      <p:grpSpPr>
-        <a:xfrm>
-          <a:off x="0" y="0"/>
-          <a:ext cx="0" cy="0"/>
-          <a:chOff x="0" y="0"/>
-          <a:chExt cx="0" cy="0"/>
-        </a:xfrm>
-      </p:grpSpPr>
-      <p:sp>
-        <p:nvSpPr>
-          <p:cNvPr id="2" name="Заголовок 1"/>
-          <p:cNvSpPr>
-            <a:spLocks noGrp="1"/>
-          </p:cNvSpPr>
-          <p:nvPr>
-            <p:ph type="title"/>
-          </p:nvPr>
-        </p:nvSpPr>
-        <p:spPr/>
-        <p:txBody>
-          <a:bodyPr/>
-          <a:lstStyle/>
-          <a:p>
-            <a:endParaRPr lang="ru-RU"/>
-          </a:p>
-        </p:txBody>
-      </p:sp>
-      <p:sp>
-        <p:nvSpPr>
-          <p:cNvPr id="3" name="Объект 2"/>
-          <p:cNvSpPr>
-            <a:spLocks noGrp="1"/>
-          </p:cNvSpPr>
-          <p:nvPr>
-            <p:ph idx="1"/>
-          </p:nvPr>
-        </p:nvSpPr>
-        <p:spPr/>
-        <p:txBody>
-          <a:bodyPr/>
-          <a:lstStyle/>
-          <a:p>
-            <a:endParaRPr lang="ru-RU"/>
-          </a:p>
-        </p:txBody>
-      </p:sp>
-      <p:pic>
-        <p:nvPicPr>
-          <p:cNvPr id="4" name="Рисунок 3"/>
-          <p:cNvPicPr>
-            <a:picLocks noChangeAspect="1"/>
-          </p:cNvPicPr>
-          <p:nvPr/>
-        </p:nvPicPr>
-        <p:blipFill>
-          <a:blip r:embed="rId2"/>
-          <a:stretch>
-            <a:fillRect/>
-          </a:stretch>
-        </p:blipFill>
-        <p:spPr>
-          <a:xfrm>
-            <a:off x="0" y="0"/>
-            <a:ext cx="12205608" cy="6858000"/>
-          </a:xfrm>
-          <a:prstGeom prst="rect">
-            <a:avLst/>
-          </a:prstGeom>
-        </p:spPr>
-      </p:pic>
-    </p:spTree>
-    <p:extLst>
-      <p:ext uri="{BB962C8B-B14F-4D97-AF65-F5344CB8AC3E}">
-        <p14:creationId xmlns:p14="http://schemas.microsoft.com/office/powerpoint/2010/main" val="2347741645"/>
-      </p:ext>
-    </p:extLst>
-  </p:cSld>
-  <p:clrMapOvr>
-    <a:masterClrMapping/>
-  </p:clrMapOvr>
-</p:sld>
-</file>
-
-<file path=ppt/slides/slide3.xml><?xml version="1.0" encoding="utf-8"?>
-<p:sld xmlns:a="http://schemas.openxmlformats.org/drawingml/2006/main" xmlns:r="http://schemas.openxmlformats.org/officeDocument/2006/relationships" xmlns:p="http://schemas.openxmlformats.org/presentationml/2006/main">
-  <p:cSld>
-    <p:spTree>
-      <p:nvGrpSpPr>
-        <p:cNvPr id="1" name=""/>
-        <p:cNvGrpSpPr/>
-        <p:nvPr/>
-      </p:nvGrpSpPr>
-      <p:grpSpPr>
-        <a:xfrm>
-          <a:off x="0" y="0"/>
-          <a:ext cx="0" cy="0"/>
-          <a:chOff x="0" y="0"/>
-          <a:chExt cx="0" cy="0"/>
-        </a:xfrm>
-      </p:grpSpPr>
-      <p:sp>
-        <p:nvSpPr>
-          <p:cNvPr id="2" name="Заголовок 1"/>
-          <p:cNvSpPr>
-            <a:spLocks noGrp="1"/>
-          </p:cNvSpPr>
-          <p:nvPr>
-            <p:ph type="title"/>
-          </p:nvPr>
-        </p:nvSpPr>
-        <p:spPr/>
-        <p:txBody>
-          <a:bodyPr/>
-          <a:lstStyle/>
-          <a:p>
-            <a:r>
-              <a:rPr lang="en-US" dirty="0" err="1" smtClean="0"/>
-              <a:t>haarcascade_frontalface_default</a:t>
-            </a:r>
-            <a:r>
-              <a:rPr lang="ru-RU" dirty="0" smtClean="0"/>
-              <a:t>.</a:t>
-            </a:r>
-            <a:r>
-              <a:rPr lang="en-US" dirty="0" smtClean="0"/>
-              <a:t>xml</a:t>
-            </a:r>
-            <a:endParaRPr lang="ru-RU" dirty="0"/>
-          </a:p>
-        </p:txBody>
-      </p:sp>
-      <p:sp>
-        <p:nvSpPr>
-          <p:cNvPr id="3" name="Объект 2"/>
-          <p:cNvSpPr>
-            <a:spLocks noGrp="1"/>
-          </p:cNvSpPr>
-          <p:nvPr>
-            <p:ph idx="1"/>
-          </p:nvPr>
-        </p:nvSpPr>
-        <p:spPr/>
-        <p:txBody>
-          <a:bodyPr/>
-          <a:lstStyle/>
-          <a:p>
-            <a:pPr marL="0" indent="0">
-              <a:buNone/>
-            </a:pPr>
-            <a:r>
-              <a:rPr lang="ru-RU" dirty="0" smtClean="0"/>
-              <a:t>для поиска лиц</a:t>
-            </a:r>
-            <a:endParaRPr lang="ru-RU" dirty="0"/>
-          </a:p>
-        </p:txBody>
-      </p:sp>
-      <p:pic>
-        <p:nvPicPr>
-          <p:cNvPr id="4" name="Рисунок 3"/>
-          <p:cNvPicPr>
-            <a:picLocks noChangeAspect="1"/>
-          </p:cNvPicPr>
-          <p:nvPr/>
-        </p:nvPicPr>
-        <p:blipFill rotWithShape="1">
-          <a:blip r:embed="rId2"/>
-          <a:srcRect r="4639"/>
-          <a:stretch/>
-        </p:blipFill>
-        <p:spPr>
-          <a:xfrm>
-            <a:off x="0" y="2930337"/>
-            <a:ext cx="12145818" cy="3410426"/>
-          </a:xfrm>
-          <a:prstGeom prst="rect">
-            <a:avLst/>
-          </a:prstGeom>
-        </p:spPr>
-      </p:pic>
-    </p:spTree>
-    <p:extLst>
-      <p:ext uri="{BB962C8B-B14F-4D97-AF65-F5344CB8AC3E}">
-        <p14:creationId xmlns:p14="http://schemas.microsoft.com/office/powerpoint/2010/main" val="2787534480"/>
-      </p:ext>
-    </p:extLst>
-  </p:cSld>
-  <p:clrMapOvr>
-    <a:masterClrMapping/>
-  </p:clrMapOvr>
-</p:sld>
-</file>
-
-<file path=ppt/slides/slide4.xml><?xml version="1.0" encoding="utf-8"?>
-<p:sld xmlns:a="http://schemas.openxmlformats.org/drawingml/2006/main" xmlns:r="http://schemas.openxmlformats.org/officeDocument/2006/relationships" xmlns:p="http://schemas.openxmlformats.org/presentationml/2006/main">
-  <p:cSld>
-    <p:spTree>
-      <p:nvGrpSpPr>
-        <p:cNvPr id="1" name=""/>
-        <p:cNvGrpSpPr/>
-        <p:nvPr/>
-      </p:nvGrpSpPr>
-      <p:grpSpPr>
-        <a:xfrm>
-          <a:off x="0" y="0"/>
-          <a:ext cx="0" cy="0"/>
-          <a:chOff x="0" y="0"/>
-          <a:chExt cx="0" cy="0"/>
-        </a:xfrm>
-      </p:grpSpPr>
-      <p:sp>
-        <p:nvSpPr>
-          <p:cNvPr id="2" name="Заголовок 1"/>
-          <p:cNvSpPr>
-            <a:spLocks noGrp="1"/>
-          </p:cNvSpPr>
-          <p:nvPr>
-            <p:ph type="title"/>
-          </p:nvPr>
-        </p:nvSpPr>
-        <p:spPr/>
-        <p:txBody>
-          <a:bodyPr/>
-          <a:lstStyle/>
-          <a:p>
-            <a:r>
-              <a:rPr lang="en-US" dirty="0"/>
-              <a:t>r</a:t>
-            </a:r>
-            <a:r>
-              <a:rPr lang="en-US" dirty="0" smtClean="0"/>
-              <a:t>equirments.txt</a:t>
-            </a:r>
-            <a:endParaRPr lang="ru-RU" dirty="0"/>
-          </a:p>
-        </p:txBody>
-      </p:sp>
-      <p:sp>
-        <p:nvSpPr>
-          <p:cNvPr id="3" name="Объект 2"/>
-          <p:cNvSpPr>
-            <a:spLocks noGrp="1"/>
-          </p:cNvSpPr>
-          <p:nvPr>
-            <p:ph idx="1"/>
-          </p:nvPr>
-        </p:nvSpPr>
-        <p:spPr/>
-        <p:txBody>
-          <a:bodyPr/>
-          <a:lstStyle/>
-          <a:p>
-            <a:endParaRPr lang="ru-RU"/>
-          </a:p>
-        </p:txBody>
-      </p:sp>
-      <p:pic>
-        <p:nvPicPr>
-          <p:cNvPr id="4" name="Рисунок 3"/>
-          <p:cNvPicPr>
-            <a:picLocks noChangeAspect="1"/>
-          </p:cNvPicPr>
-          <p:nvPr/>
-        </p:nvPicPr>
-        <p:blipFill>
-          <a:blip r:embed="rId2"/>
-          <a:stretch>
-            <a:fillRect/>
-          </a:stretch>
-        </p:blipFill>
-        <p:spPr>
-          <a:xfrm>
-            <a:off x="3675226" y="1371372"/>
-            <a:ext cx="8101138" cy="5234699"/>
-          </a:xfrm>
-          <a:prstGeom prst="rect">
-            <a:avLst/>
-          </a:prstGeom>
-        </p:spPr>
-      </p:pic>
-    </p:spTree>
-    <p:extLst>
-      <p:ext uri="{BB962C8B-B14F-4D97-AF65-F5344CB8AC3E}">
-        <p14:creationId xmlns:p14="http://schemas.microsoft.com/office/powerpoint/2010/main" val="1434674317"/>
-      </p:ext>
-    </p:extLst>
-  </p:cSld>
-  <p:clrMapOvr>
-    <a:masterClrMapping/>
-  </p:clrMapOvr>
-</p:sld>
-</file>
-
-<file path=ppt/slides/slide5.xml><?xml version="1.0" encoding="utf-8"?>
-<p:sld xmlns:a="http://schemas.openxmlformats.org/drawingml/2006/main" xmlns:r="http://schemas.openxmlformats.org/officeDocument/2006/relationships" xmlns:p="http://schemas.openxmlformats.org/presentationml/2006/main">
-  <p:cSld>
-    <p:spTree>
-      <p:nvGrpSpPr>
-        <p:cNvPr id="1" name=""/>
-        <p:cNvGrpSpPr/>
-        <p:nvPr/>
-      </p:nvGrpSpPr>
-      <p:grpSpPr>
-        <a:xfrm>
-          <a:off x="0" y="0"/>
-          <a:ext cx="0" cy="0"/>
-          <a:chOff x="0" y="0"/>
-          <a:chExt cx="0" cy="0"/>
-        </a:xfrm>
-      </p:grpSpPr>
-      <p:sp>
-        <p:nvSpPr>
-          <p:cNvPr id="3" name="Объект 2"/>
-          <p:cNvSpPr>
-            <a:spLocks noGrp="1"/>
-          </p:cNvSpPr>
-          <p:nvPr>
-            <p:ph idx="1"/>
-          </p:nvPr>
-        </p:nvSpPr>
-        <p:spPr>
-          <a:xfrm>
-            <a:off x="723516" y="849026"/>
-            <a:ext cx="8596668" cy="3880773"/>
-          </a:xfrm>
-        </p:spPr>
-        <p:txBody>
-          <a:bodyPr/>
-          <a:lstStyle/>
-          <a:p>
-            <a:pPr marL="0" indent="0">
-              <a:buNone/>
-            </a:pPr>
-            <a:r>
-              <a:rPr lang="en-US" dirty="0" smtClean="0"/>
-              <a:t>emotion_detector.py</a:t>
-            </a:r>
-            <a:endParaRPr lang="ru-RU" dirty="0"/>
-          </a:p>
-        </p:txBody>
-      </p:sp>
-      <p:pic>
-        <p:nvPicPr>
-          <p:cNvPr id="7" name="Рисунок 6"/>
-          <p:cNvPicPr>
-            <a:picLocks noChangeAspect="1"/>
-          </p:cNvPicPr>
-          <p:nvPr/>
-        </p:nvPicPr>
-        <p:blipFill>
-          <a:blip r:embed="rId2"/>
-          <a:stretch>
-            <a:fillRect/>
-          </a:stretch>
-        </p:blipFill>
-        <p:spPr>
-          <a:xfrm>
-            <a:off x="0" y="2240233"/>
-            <a:ext cx="9897856" cy="4372585"/>
-          </a:xfrm>
-          <a:prstGeom prst="rect">
-            <a:avLst/>
-          </a:prstGeom>
-        </p:spPr>
-      </p:pic>
-    </p:spTree>
-    <p:extLst>
-      <p:ext uri="{BB962C8B-B14F-4D97-AF65-F5344CB8AC3E}">
-        <p14:creationId xmlns:p14="http://schemas.microsoft.com/office/powerpoint/2010/main" val="1731209726"/>
-      </p:ext>
-    </p:extLst>
-  </p:cSld>
-  <p:clrMapOvr>
-    <a:masterClrMapping/>
-  </p:clrMapOvr>
-</p:sld>
-</file>
-
-<file path=ppt/slides/slide6.xml><?xml version="1.0" encoding="utf-8"?>
-<p:sld xmlns:a="http://schemas.openxmlformats.org/drawingml/2006/main" xmlns:r="http://schemas.openxmlformats.org/officeDocument/2006/relationships" xmlns:p="http://schemas.openxmlformats.org/presentationml/2006/main">
-  <p:cSld>
-    <p:spTree>
-      <p:nvGrpSpPr>
-        <p:cNvPr id="1" name=""/>
-        <p:cNvGrpSpPr/>
-        <p:nvPr/>
-      </p:nvGrpSpPr>
-      <p:grpSpPr>
-        <a:xfrm>
-          <a:off x="0" y="0"/>
-          <a:ext cx="0" cy="0"/>
-          <a:chOff x="0" y="0"/>
-          <a:chExt cx="0" cy="0"/>
-        </a:xfrm>
-      </p:grpSpPr>
-      <p:pic>
-        <p:nvPicPr>
-          <p:cNvPr id="4" name="Рисунок 3"/>
-          <p:cNvPicPr>
-            <a:picLocks noChangeAspect="1"/>
-          </p:cNvPicPr>
-          <p:nvPr/>
-        </p:nvPicPr>
-        <p:blipFill>
-          <a:blip r:embed="rId2"/>
-          <a:stretch>
-            <a:fillRect/>
-          </a:stretch>
-        </p:blipFill>
-        <p:spPr>
-          <a:xfrm>
-            <a:off x="0" y="609600"/>
-            <a:ext cx="11288700" cy="5496692"/>
-          </a:xfrm>
-          <a:prstGeom prst="rect">
-            <a:avLst/>
-          </a:prstGeom>
-        </p:spPr>
-      </p:pic>
-    </p:spTree>
-    <p:extLst>
-      <p:ext uri="{BB962C8B-B14F-4D97-AF65-F5344CB8AC3E}">
-        <p14:creationId xmlns:p14="http://schemas.microsoft.com/office/powerpoint/2010/main" val="1432101464"/>
-      </p:ext>
-    </p:extLst>
-  </p:cSld>
-  <p:clrMapOvr>
-    <a:masterClrMapping/>
-  </p:clrMapOvr>
-</p:sld>
-</file>
-
-<file path=ppt/slides/slide7.xml><?xml version="1.0" encoding="utf-8"?>
-<p:sld xmlns:a="http://schemas.openxmlformats.org/drawingml/2006/main" xmlns:r="http://schemas.openxmlformats.org/officeDocument/2006/relationships" xmlns:p="http://schemas.openxmlformats.org/presentationml/2006/main">
-  <p:cSld>
-    <p:spTree>
-      <p:nvGrpSpPr>
-        <p:cNvPr id="1" name=""/>
-        <p:cNvGrpSpPr/>
-        <p:nvPr/>
-      </p:nvGrpSpPr>
-      <p:grpSpPr>
-        <a:xfrm>
-          <a:off x="0" y="0"/>
-          <a:ext cx="0" cy="0"/>
-          <a:chOff x="0" y="0"/>
-          <a:chExt cx="0" cy="0"/>
-        </a:xfrm>
-      </p:grpSpPr>
-      <p:sp>
-        <p:nvSpPr>
-          <p:cNvPr id="2" name="Заголовок 1"/>
-          <p:cNvSpPr>
-            <a:spLocks noGrp="1"/>
-          </p:cNvSpPr>
-          <p:nvPr>
-            <p:ph type="title"/>
-          </p:nvPr>
-        </p:nvSpPr>
-        <p:spPr/>
-        <p:txBody>
-          <a:bodyPr/>
-          <a:lstStyle/>
-          <a:p>
-            <a:r>
-              <a:rPr lang="ru-RU" dirty="0" smtClean="0"/>
-              <a:t>Примеры работы</a:t>
-            </a:r>
-            <a:endParaRPr lang="ru-RU" dirty="0"/>
-          </a:p>
-        </p:txBody>
-      </p:sp>
-      <p:sp>
-        <p:nvSpPr>
-          <p:cNvPr id="3" name="Объект 2"/>
-          <p:cNvSpPr>
-            <a:spLocks noGrp="1"/>
-          </p:cNvSpPr>
-          <p:nvPr>
-            <p:ph idx="1"/>
-          </p:nvPr>
-        </p:nvSpPr>
-        <p:spPr/>
-        <p:txBody>
-          <a:bodyPr/>
-          <a:lstStyle/>
-          <a:p>
-            <a:endParaRPr lang="ru-RU"/>
-          </a:p>
-        </p:txBody>
-      </p:sp>
-      <p:pic>
-        <p:nvPicPr>
-          <p:cNvPr id="4" name="Рисунок 3"/>
-          <p:cNvPicPr>
-            <a:picLocks noChangeAspect="1"/>
-          </p:cNvPicPr>
-          <p:nvPr/>
-        </p:nvPicPr>
-        <p:blipFill>
-          <a:blip r:embed="rId2"/>
-          <a:stretch>
-            <a:fillRect/>
-          </a:stretch>
-        </p:blipFill>
-        <p:spPr>
-          <a:xfrm>
-            <a:off x="0" y="1736436"/>
-            <a:ext cx="6107459" cy="4892121"/>
-          </a:xfrm>
-          <a:prstGeom prst="rect">
-            <a:avLst/>
-          </a:prstGeom>
-        </p:spPr>
-      </p:pic>
-      <p:pic>
-        <p:nvPicPr>
-          <p:cNvPr id="5" name="Рисунок 4"/>
-          <p:cNvPicPr>
-            <a:picLocks noChangeAspect="1"/>
-          </p:cNvPicPr>
-          <p:nvPr/>
-        </p:nvPicPr>
-        <p:blipFill>
-          <a:blip r:embed="rId3"/>
-          <a:stretch>
-            <a:fillRect/>
-          </a:stretch>
-        </p:blipFill>
-        <p:spPr>
-          <a:xfrm>
-            <a:off x="6180662" y="1736436"/>
-            <a:ext cx="6107981" cy="4792534"/>
-          </a:xfrm>
-          <a:prstGeom prst="rect">
-            <a:avLst/>
-          </a:prstGeom>
-        </p:spPr>
-      </p:pic>
-    </p:spTree>
-    <p:extLst>
-      <p:ext uri="{BB962C8B-B14F-4D97-AF65-F5344CB8AC3E}">
-        <p14:creationId xmlns:p14="http://schemas.microsoft.com/office/powerpoint/2010/main" val="2494730592"/>
-      </p:ext>
-    </p:extLst>
-  </p:cSld>
-  <p:clrMapOvr>
-    <a:masterClrMapping/>
-  </p:clrMapOvr>
-</p:sld>
-</file>
-
-<file path=ppt/slides/slide8.xml><?xml version="1.0" encoding="utf-8"?>
+<file path=ppt/slides/slide10.xml><?xml version="1.0" encoding="utf-8"?>
 <p:sld xmlns:a="http://schemas.openxmlformats.org/drawingml/2006/main" xmlns:r="http://schemas.openxmlformats.org/officeDocument/2006/relationships" xmlns:p="http://schemas.openxmlformats.org/presentationml/2006/main">
   <p:cSld>
     <p:spTree>
@@ -6567,6 +6008,822 @@
 </p:sld>
 </file>
 
+<file path=ppt/slides/slide11.xml><?xml version="1.0" encoding="utf-8"?>
+<p:sld xmlns:a="http://schemas.openxmlformats.org/drawingml/2006/main" xmlns:r="http://schemas.openxmlformats.org/officeDocument/2006/relationships" xmlns:p="http://schemas.openxmlformats.org/presentationml/2006/main">
+  <p:cSld>
+    <p:spTree>
+      <p:nvGrpSpPr>
+        <p:cNvPr id="1" name=""/>
+        <p:cNvGrpSpPr/>
+        <p:nvPr/>
+      </p:nvGrpSpPr>
+      <p:grpSpPr>
+        <a:xfrm>
+          <a:off x="0" y="0"/>
+          <a:ext cx="0" cy="0"/>
+          <a:chOff x="0" y="0"/>
+          <a:chExt cx="0" cy="0"/>
+        </a:xfrm>
+      </p:grpSpPr>
+      <p:sp>
+        <p:nvSpPr>
+          <p:cNvPr id="2" name="Заголовок 1"/>
+          <p:cNvSpPr>
+            <a:spLocks noGrp="1"/>
+          </p:cNvSpPr>
+          <p:nvPr>
+            <p:ph type="ctrTitle"/>
+          </p:nvPr>
+        </p:nvSpPr>
+        <p:spPr/>
+        <p:txBody>
+          <a:bodyPr/>
+          <a:lstStyle/>
+          <a:p>
+            <a:r>
+              <a:rPr lang="en-US" dirty="0" smtClean="0"/>
+              <a:t>Emotion detector project</a:t>
+            </a:r>
+            <a:endParaRPr lang="ru-RU" dirty="0"/>
+          </a:p>
+        </p:txBody>
+      </p:sp>
+      <p:sp>
+        <p:nvSpPr>
+          <p:cNvPr id="3" name="Подзаголовок 2"/>
+          <p:cNvSpPr>
+            <a:spLocks noGrp="1"/>
+          </p:cNvSpPr>
+          <p:nvPr>
+            <p:ph type="subTitle" idx="1"/>
+          </p:nvPr>
+        </p:nvSpPr>
+        <p:spPr/>
+        <p:txBody>
+          <a:bodyPr/>
+          <a:lstStyle/>
+          <a:p>
+            <a:r>
+              <a:rPr lang="ru-RU" dirty="0" smtClean="0"/>
+              <a:t>Мухаметшин Дамир, БЦМТ242 </a:t>
+            </a:r>
+            <a:r>
+              <a:rPr lang="ru-RU" dirty="0" err="1" smtClean="0"/>
+              <a:t>Матфак</a:t>
+            </a:r>
+            <a:r>
+              <a:rPr lang="ru-RU" dirty="0" smtClean="0"/>
+              <a:t> ВШЭ</a:t>
+            </a:r>
+            <a:endParaRPr lang="ru-RU" dirty="0"/>
+          </a:p>
+        </p:txBody>
+      </p:sp>
+    </p:spTree>
+    <p:extLst>
+      <p:ext uri="{BB962C8B-B14F-4D97-AF65-F5344CB8AC3E}">
+        <p14:creationId xmlns:p14="http://schemas.microsoft.com/office/powerpoint/2010/main" val="3048669636"/>
+      </p:ext>
+    </p:extLst>
+  </p:cSld>
+  <p:clrMapOvr>
+    <a:masterClrMapping/>
+  </p:clrMapOvr>
+</p:sld>
+</file>
+
+<file path=ppt/slides/slide2.xml><?xml version="1.0" encoding="utf-8"?>
+<p:sld xmlns:a="http://schemas.openxmlformats.org/drawingml/2006/main" xmlns:r="http://schemas.openxmlformats.org/officeDocument/2006/relationships" xmlns:p="http://schemas.openxmlformats.org/presentationml/2006/main">
+  <p:cSld>
+    <p:spTree>
+      <p:nvGrpSpPr>
+        <p:cNvPr id="1" name=""/>
+        <p:cNvGrpSpPr/>
+        <p:nvPr/>
+      </p:nvGrpSpPr>
+      <p:grpSpPr>
+        <a:xfrm>
+          <a:off x="0" y="0"/>
+          <a:ext cx="0" cy="0"/>
+          <a:chOff x="0" y="0"/>
+          <a:chExt cx="0" cy="0"/>
+        </a:xfrm>
+      </p:grpSpPr>
+      <p:sp>
+        <p:nvSpPr>
+          <p:cNvPr id="2" name="Заголовок 1"/>
+          <p:cNvSpPr>
+            <a:spLocks noGrp="1"/>
+          </p:cNvSpPr>
+          <p:nvPr>
+            <p:ph type="title"/>
+          </p:nvPr>
+        </p:nvSpPr>
+        <p:spPr/>
+        <p:txBody>
+          <a:bodyPr/>
+          <a:lstStyle/>
+          <a:p>
+            <a:r>
+              <a:rPr lang="ru-RU" dirty="0" smtClean="0"/>
+              <a:t>План продукта</a:t>
+            </a:r>
+            <a:endParaRPr lang="ru-RU" dirty="0"/>
+          </a:p>
+        </p:txBody>
+      </p:sp>
+      <p:sp>
+        <p:nvSpPr>
+          <p:cNvPr id="3" name="Объект 2"/>
+          <p:cNvSpPr>
+            <a:spLocks noGrp="1"/>
+          </p:cNvSpPr>
+          <p:nvPr>
+            <p:ph idx="1"/>
+          </p:nvPr>
+        </p:nvSpPr>
+        <p:spPr/>
+        <p:txBody>
+          <a:bodyPr/>
+          <a:lstStyle/>
+          <a:p>
+            <a:pPr marL="0" indent="0">
+              <a:buNone/>
+            </a:pPr>
+            <a:r>
+              <a:rPr lang="ru-RU" dirty="0" smtClean="0"/>
+              <a:t>Критерии:</a:t>
+            </a:r>
+          </a:p>
+          <a:p>
+            <a:pPr marL="0" indent="0">
+              <a:buNone/>
+            </a:pPr>
+            <a:r>
+              <a:rPr lang="ru-RU" dirty="0" smtClean="0"/>
+              <a:t>Программа запускает окно с изображением с камеры устройства</a:t>
+            </a:r>
+          </a:p>
+          <a:p>
+            <a:pPr marL="0" indent="0">
+              <a:buNone/>
+            </a:pPr>
+            <a:r>
+              <a:rPr lang="ru-RU" dirty="0" smtClean="0"/>
+              <a:t>Программа распознает лица с камеры</a:t>
+            </a:r>
+          </a:p>
+          <a:p>
+            <a:pPr marL="0" indent="0">
+              <a:buNone/>
+            </a:pPr>
+            <a:r>
+              <a:rPr lang="ru-RU" dirty="0" smtClean="0"/>
+              <a:t>Для каждого лица должна быть распознана и подписана наиболее вероятная эмоция</a:t>
+            </a:r>
+          </a:p>
+          <a:p>
+            <a:pPr marL="0" indent="0">
+              <a:buNone/>
+            </a:pPr>
+            <a:r>
+              <a:rPr lang="ru-RU" dirty="0" smtClean="0"/>
+              <a:t>Обновление распознаваний происходит в реальном времени</a:t>
+            </a:r>
+          </a:p>
+          <a:p>
+            <a:pPr marL="0" indent="0">
+              <a:buNone/>
+            </a:pPr>
+            <a:r>
+              <a:rPr lang="ru-RU" dirty="0" smtClean="0"/>
+              <a:t>Выход по вводу </a:t>
+            </a:r>
+            <a:r>
+              <a:rPr lang="en-US" dirty="0" smtClean="0"/>
+              <a:t>“q”</a:t>
+            </a:r>
+            <a:endParaRPr lang="ru-RU" dirty="0"/>
+          </a:p>
+        </p:txBody>
+      </p:sp>
+    </p:spTree>
+    <p:extLst>
+      <p:ext uri="{BB962C8B-B14F-4D97-AF65-F5344CB8AC3E}">
+        <p14:creationId xmlns:p14="http://schemas.microsoft.com/office/powerpoint/2010/main" val="1899974557"/>
+      </p:ext>
+    </p:extLst>
+  </p:cSld>
+  <p:clrMapOvr>
+    <a:masterClrMapping/>
+  </p:clrMapOvr>
+</p:sld>
+</file>
+
+<file path=ppt/slides/slide3.xml><?xml version="1.0" encoding="utf-8"?>
+<p:sld xmlns:a="http://schemas.openxmlformats.org/drawingml/2006/main" xmlns:r="http://schemas.openxmlformats.org/officeDocument/2006/relationships" xmlns:p="http://schemas.openxmlformats.org/presentationml/2006/main">
+  <p:cSld>
+    <p:spTree>
+      <p:nvGrpSpPr>
+        <p:cNvPr id="1" name=""/>
+        <p:cNvGrpSpPr/>
+        <p:nvPr/>
+      </p:nvGrpSpPr>
+      <p:grpSpPr>
+        <a:xfrm>
+          <a:off x="0" y="0"/>
+          <a:ext cx="0" cy="0"/>
+          <a:chOff x="0" y="0"/>
+          <a:chExt cx="0" cy="0"/>
+        </a:xfrm>
+      </p:grpSpPr>
+      <p:sp>
+        <p:nvSpPr>
+          <p:cNvPr id="2" name="Заголовок 1"/>
+          <p:cNvSpPr>
+            <a:spLocks noGrp="1"/>
+          </p:cNvSpPr>
+          <p:nvPr>
+            <p:ph type="title"/>
+          </p:nvPr>
+        </p:nvSpPr>
+        <p:spPr/>
+        <p:txBody>
+          <a:bodyPr/>
+          <a:lstStyle/>
+          <a:p>
+            <a:r>
+              <a:rPr lang="ru-RU" dirty="0" smtClean="0"/>
+              <a:t>Цель, задачи, методы…</a:t>
+            </a:r>
+            <a:endParaRPr lang="ru-RU" dirty="0"/>
+          </a:p>
+        </p:txBody>
+      </p:sp>
+      <p:sp>
+        <p:nvSpPr>
+          <p:cNvPr id="3" name="Объект 2"/>
+          <p:cNvSpPr>
+            <a:spLocks noGrp="1"/>
+          </p:cNvSpPr>
+          <p:nvPr>
+            <p:ph idx="1"/>
+          </p:nvPr>
+        </p:nvSpPr>
+        <p:spPr/>
+        <p:txBody>
+          <a:bodyPr/>
+          <a:lstStyle/>
+          <a:p>
+            <a:r>
+              <a:rPr lang="ru-RU" dirty="0" smtClean="0"/>
+              <a:t>Цель: написать программу, </a:t>
+            </a:r>
+            <a:r>
+              <a:rPr lang="ru-RU" dirty="0"/>
+              <a:t>которая использует веб-камеру для захвата </a:t>
+            </a:r>
+            <a:r>
+              <a:rPr lang="ru-RU" dirty="0" smtClean="0"/>
+              <a:t>видеопотока, обнаруживает лица, распознает эмоции на них и подписывает эмоции рядом с лицами</a:t>
+            </a:r>
+          </a:p>
+          <a:p>
+            <a:r>
+              <a:rPr lang="ru-RU" dirty="0" smtClean="0"/>
+              <a:t>Задачи: 1. Изучить нужные библиотеки. 2. Написать обнаружение лиц. 3. Написать распознавание эмоций. 4. Написать визуализацию результатов для пользователя. 5. Написать завершение программы. 6. </a:t>
+            </a:r>
+            <a:r>
+              <a:rPr lang="ru-RU" dirty="0" err="1" smtClean="0"/>
+              <a:t>Дебаг</a:t>
+            </a:r>
+            <a:r>
+              <a:rPr lang="ru-RU" dirty="0" smtClean="0"/>
+              <a:t>. 7. Загрузка на </a:t>
+            </a:r>
+            <a:r>
+              <a:rPr lang="ru-RU" dirty="0" err="1" smtClean="0"/>
+              <a:t>гитхаб</a:t>
+            </a:r>
+            <a:r>
+              <a:rPr lang="ru-RU" dirty="0" smtClean="0"/>
+              <a:t> и создание презентации</a:t>
+            </a:r>
+          </a:p>
+          <a:p>
+            <a:endParaRPr lang="ru-RU" dirty="0"/>
+          </a:p>
+          <a:p>
+            <a:r>
+              <a:rPr lang="ru-RU" dirty="0" smtClean="0"/>
+              <a:t>Были использованы библиотеки </a:t>
+            </a:r>
+            <a:r>
+              <a:rPr lang="en-US" dirty="0" err="1" smtClean="0"/>
+              <a:t>OpenCV</a:t>
+            </a:r>
+            <a:r>
+              <a:rPr lang="en-US" dirty="0" smtClean="0"/>
+              <a:t> </a:t>
+            </a:r>
+            <a:r>
+              <a:rPr lang="en-US" dirty="0"/>
+              <a:t>- Open Source Computer Vision Library </a:t>
+            </a:r>
+            <a:r>
+              <a:rPr lang="ru-RU" dirty="0"/>
+              <a:t>для распознавания лиц</a:t>
+            </a:r>
+            <a:r>
+              <a:rPr lang="en-US" dirty="0"/>
+              <a:t> </a:t>
+            </a:r>
+            <a:r>
+              <a:rPr lang="ru-RU" dirty="0"/>
+              <a:t>и </a:t>
+            </a:r>
+            <a:r>
+              <a:rPr lang="en-US" dirty="0" err="1"/>
+              <a:t>DeepFace</a:t>
+            </a:r>
+            <a:r>
+              <a:rPr lang="ru-RU" dirty="0"/>
+              <a:t> для распознавания </a:t>
+            </a:r>
+            <a:r>
+              <a:rPr lang="ru-RU" dirty="0" smtClean="0"/>
+              <a:t>эмоций. Все инструменты и методы заимствованы из библиотек и по сути своей помогают реализации задач 2-5.</a:t>
+            </a:r>
+            <a:endParaRPr lang="ru-RU" dirty="0"/>
+          </a:p>
+        </p:txBody>
+      </p:sp>
+    </p:spTree>
+    <p:extLst>
+      <p:ext uri="{BB962C8B-B14F-4D97-AF65-F5344CB8AC3E}">
+        <p14:creationId xmlns:p14="http://schemas.microsoft.com/office/powerpoint/2010/main" val="4285765069"/>
+      </p:ext>
+    </p:extLst>
+  </p:cSld>
+  <p:clrMapOvr>
+    <a:masterClrMapping/>
+  </p:clrMapOvr>
+</p:sld>
+</file>
+
+<file path=ppt/slides/slide4.xml><?xml version="1.0" encoding="utf-8"?>
+<p:sld xmlns:a="http://schemas.openxmlformats.org/drawingml/2006/main" xmlns:r="http://schemas.openxmlformats.org/officeDocument/2006/relationships" xmlns:p="http://schemas.openxmlformats.org/presentationml/2006/main">
+  <p:cSld>
+    <p:spTree>
+      <p:nvGrpSpPr>
+        <p:cNvPr id="1" name=""/>
+        <p:cNvGrpSpPr/>
+        <p:nvPr/>
+      </p:nvGrpSpPr>
+      <p:grpSpPr>
+        <a:xfrm>
+          <a:off x="0" y="0"/>
+          <a:ext cx="0" cy="0"/>
+          <a:chOff x="0" y="0"/>
+          <a:chExt cx="0" cy="0"/>
+        </a:xfrm>
+      </p:grpSpPr>
+      <p:sp>
+        <p:nvSpPr>
+          <p:cNvPr id="2" name="Заголовок 1"/>
+          <p:cNvSpPr>
+            <a:spLocks noGrp="1"/>
+          </p:cNvSpPr>
+          <p:nvPr>
+            <p:ph type="title"/>
+          </p:nvPr>
+        </p:nvSpPr>
+        <p:spPr/>
+        <p:txBody>
+          <a:bodyPr/>
+          <a:lstStyle/>
+          <a:p>
+            <a:endParaRPr lang="ru-RU"/>
+          </a:p>
+        </p:txBody>
+      </p:sp>
+      <p:sp>
+        <p:nvSpPr>
+          <p:cNvPr id="3" name="Объект 2"/>
+          <p:cNvSpPr>
+            <a:spLocks noGrp="1"/>
+          </p:cNvSpPr>
+          <p:nvPr>
+            <p:ph idx="1"/>
+          </p:nvPr>
+        </p:nvSpPr>
+        <p:spPr/>
+        <p:txBody>
+          <a:bodyPr/>
+          <a:lstStyle/>
+          <a:p>
+            <a:endParaRPr lang="ru-RU"/>
+          </a:p>
+        </p:txBody>
+      </p:sp>
+      <p:pic>
+        <p:nvPicPr>
+          <p:cNvPr id="4" name="Рисунок 3"/>
+          <p:cNvPicPr>
+            <a:picLocks noChangeAspect="1"/>
+          </p:cNvPicPr>
+          <p:nvPr/>
+        </p:nvPicPr>
+        <p:blipFill>
+          <a:blip r:embed="rId2"/>
+          <a:stretch>
+            <a:fillRect/>
+          </a:stretch>
+        </p:blipFill>
+        <p:spPr>
+          <a:xfrm>
+            <a:off x="0" y="0"/>
+            <a:ext cx="12205608" cy="6858000"/>
+          </a:xfrm>
+          <a:prstGeom prst="rect">
+            <a:avLst/>
+          </a:prstGeom>
+        </p:spPr>
+      </p:pic>
+    </p:spTree>
+    <p:extLst>
+      <p:ext uri="{BB962C8B-B14F-4D97-AF65-F5344CB8AC3E}">
+        <p14:creationId xmlns:p14="http://schemas.microsoft.com/office/powerpoint/2010/main" val="2347741645"/>
+      </p:ext>
+    </p:extLst>
+  </p:cSld>
+  <p:clrMapOvr>
+    <a:masterClrMapping/>
+  </p:clrMapOvr>
+</p:sld>
+</file>
+
+<file path=ppt/slides/slide5.xml><?xml version="1.0" encoding="utf-8"?>
+<p:sld xmlns:a="http://schemas.openxmlformats.org/drawingml/2006/main" xmlns:r="http://schemas.openxmlformats.org/officeDocument/2006/relationships" xmlns:p="http://schemas.openxmlformats.org/presentationml/2006/main">
+  <p:cSld>
+    <p:spTree>
+      <p:nvGrpSpPr>
+        <p:cNvPr id="1" name=""/>
+        <p:cNvGrpSpPr/>
+        <p:nvPr/>
+      </p:nvGrpSpPr>
+      <p:grpSpPr>
+        <a:xfrm>
+          <a:off x="0" y="0"/>
+          <a:ext cx="0" cy="0"/>
+          <a:chOff x="0" y="0"/>
+          <a:chExt cx="0" cy="0"/>
+        </a:xfrm>
+      </p:grpSpPr>
+      <p:sp>
+        <p:nvSpPr>
+          <p:cNvPr id="2" name="Заголовок 1"/>
+          <p:cNvSpPr>
+            <a:spLocks noGrp="1"/>
+          </p:cNvSpPr>
+          <p:nvPr>
+            <p:ph type="title"/>
+          </p:nvPr>
+        </p:nvSpPr>
+        <p:spPr/>
+        <p:txBody>
+          <a:bodyPr/>
+          <a:lstStyle/>
+          <a:p>
+            <a:r>
+              <a:rPr lang="en-US" dirty="0" err="1" smtClean="0"/>
+              <a:t>haarcascade_frontalface_default</a:t>
+            </a:r>
+            <a:r>
+              <a:rPr lang="ru-RU" dirty="0" smtClean="0"/>
+              <a:t>.</a:t>
+            </a:r>
+            <a:r>
+              <a:rPr lang="en-US" dirty="0" smtClean="0"/>
+              <a:t>xml</a:t>
+            </a:r>
+            <a:endParaRPr lang="ru-RU" dirty="0"/>
+          </a:p>
+        </p:txBody>
+      </p:sp>
+      <p:sp>
+        <p:nvSpPr>
+          <p:cNvPr id="3" name="Объект 2"/>
+          <p:cNvSpPr>
+            <a:spLocks noGrp="1"/>
+          </p:cNvSpPr>
+          <p:nvPr>
+            <p:ph idx="1"/>
+          </p:nvPr>
+        </p:nvSpPr>
+        <p:spPr>
+          <a:xfrm>
+            <a:off x="717359" y="2179062"/>
+            <a:ext cx="8596668" cy="3880773"/>
+          </a:xfrm>
+        </p:spPr>
+        <p:txBody>
+          <a:bodyPr/>
+          <a:lstStyle/>
+          <a:p>
+            <a:pPr marL="0" indent="0">
+              <a:buNone/>
+            </a:pPr>
+            <a:r>
+              <a:rPr lang="ru-RU" dirty="0"/>
+              <a:t>предварительно обученный </a:t>
+            </a:r>
+            <a:r>
+              <a:rPr lang="ru-RU" dirty="0" smtClean="0"/>
+              <a:t>алгоритм для </a:t>
+            </a:r>
+            <a:r>
+              <a:rPr lang="ru-RU" dirty="0"/>
+              <a:t>обнаружения человеческих лиц</a:t>
+            </a:r>
+          </a:p>
+        </p:txBody>
+      </p:sp>
+      <p:pic>
+        <p:nvPicPr>
+          <p:cNvPr id="4" name="Рисунок 3"/>
+          <p:cNvPicPr>
+            <a:picLocks noChangeAspect="1"/>
+          </p:cNvPicPr>
+          <p:nvPr/>
+        </p:nvPicPr>
+        <p:blipFill rotWithShape="1">
+          <a:blip r:embed="rId2"/>
+          <a:srcRect r="4639"/>
+          <a:stretch/>
+        </p:blipFill>
+        <p:spPr>
+          <a:xfrm>
+            <a:off x="0" y="3105828"/>
+            <a:ext cx="12145818" cy="3410426"/>
+          </a:xfrm>
+          <a:prstGeom prst="rect">
+            <a:avLst/>
+          </a:prstGeom>
+        </p:spPr>
+      </p:pic>
+    </p:spTree>
+    <p:extLst>
+      <p:ext uri="{BB962C8B-B14F-4D97-AF65-F5344CB8AC3E}">
+        <p14:creationId xmlns:p14="http://schemas.microsoft.com/office/powerpoint/2010/main" val="2787534480"/>
+      </p:ext>
+    </p:extLst>
+  </p:cSld>
+  <p:clrMapOvr>
+    <a:masterClrMapping/>
+  </p:clrMapOvr>
+</p:sld>
+</file>
+
+<file path=ppt/slides/slide6.xml><?xml version="1.0" encoding="utf-8"?>
+<p:sld xmlns:a="http://schemas.openxmlformats.org/drawingml/2006/main" xmlns:r="http://schemas.openxmlformats.org/officeDocument/2006/relationships" xmlns:p="http://schemas.openxmlformats.org/presentationml/2006/main">
+  <p:cSld>
+    <p:spTree>
+      <p:nvGrpSpPr>
+        <p:cNvPr id="1" name=""/>
+        <p:cNvGrpSpPr/>
+        <p:nvPr/>
+      </p:nvGrpSpPr>
+      <p:grpSpPr>
+        <a:xfrm>
+          <a:off x="0" y="0"/>
+          <a:ext cx="0" cy="0"/>
+          <a:chOff x="0" y="0"/>
+          <a:chExt cx="0" cy="0"/>
+        </a:xfrm>
+      </p:grpSpPr>
+      <p:sp>
+        <p:nvSpPr>
+          <p:cNvPr id="2" name="Заголовок 1"/>
+          <p:cNvSpPr>
+            <a:spLocks noGrp="1"/>
+          </p:cNvSpPr>
+          <p:nvPr>
+            <p:ph type="title"/>
+          </p:nvPr>
+        </p:nvSpPr>
+        <p:spPr/>
+        <p:txBody>
+          <a:bodyPr/>
+          <a:lstStyle/>
+          <a:p>
+            <a:r>
+              <a:rPr lang="en-US" dirty="0"/>
+              <a:t>r</a:t>
+            </a:r>
+            <a:r>
+              <a:rPr lang="en-US" dirty="0" smtClean="0"/>
+              <a:t>equirments.txt</a:t>
+            </a:r>
+            <a:endParaRPr lang="ru-RU" dirty="0"/>
+          </a:p>
+        </p:txBody>
+      </p:sp>
+      <p:sp>
+        <p:nvSpPr>
+          <p:cNvPr id="3" name="Объект 2"/>
+          <p:cNvSpPr>
+            <a:spLocks noGrp="1"/>
+          </p:cNvSpPr>
+          <p:nvPr>
+            <p:ph idx="1"/>
+          </p:nvPr>
+        </p:nvSpPr>
+        <p:spPr/>
+        <p:txBody>
+          <a:bodyPr/>
+          <a:lstStyle/>
+          <a:p>
+            <a:endParaRPr lang="ru-RU"/>
+          </a:p>
+        </p:txBody>
+      </p:sp>
+      <p:pic>
+        <p:nvPicPr>
+          <p:cNvPr id="4" name="Рисунок 3"/>
+          <p:cNvPicPr>
+            <a:picLocks noChangeAspect="1"/>
+          </p:cNvPicPr>
+          <p:nvPr/>
+        </p:nvPicPr>
+        <p:blipFill>
+          <a:blip r:embed="rId2"/>
+          <a:stretch>
+            <a:fillRect/>
+          </a:stretch>
+        </p:blipFill>
+        <p:spPr>
+          <a:xfrm>
+            <a:off x="3675226" y="1371372"/>
+            <a:ext cx="8101138" cy="5234699"/>
+          </a:xfrm>
+          <a:prstGeom prst="rect">
+            <a:avLst/>
+          </a:prstGeom>
+        </p:spPr>
+      </p:pic>
+    </p:spTree>
+    <p:extLst>
+      <p:ext uri="{BB962C8B-B14F-4D97-AF65-F5344CB8AC3E}">
+        <p14:creationId xmlns:p14="http://schemas.microsoft.com/office/powerpoint/2010/main" val="1434674317"/>
+      </p:ext>
+    </p:extLst>
+  </p:cSld>
+  <p:clrMapOvr>
+    <a:masterClrMapping/>
+  </p:clrMapOvr>
+</p:sld>
+</file>
+
+<file path=ppt/slides/slide7.xml><?xml version="1.0" encoding="utf-8"?>
+<p:sld xmlns:a="http://schemas.openxmlformats.org/drawingml/2006/main" xmlns:r="http://schemas.openxmlformats.org/officeDocument/2006/relationships" xmlns:p="http://schemas.openxmlformats.org/presentationml/2006/main">
+  <p:cSld>
+    <p:spTree>
+      <p:nvGrpSpPr>
+        <p:cNvPr id="1" name=""/>
+        <p:cNvGrpSpPr/>
+        <p:nvPr/>
+      </p:nvGrpSpPr>
+      <p:grpSpPr>
+        <a:xfrm>
+          <a:off x="0" y="0"/>
+          <a:ext cx="0" cy="0"/>
+          <a:chOff x="0" y="0"/>
+          <a:chExt cx="0" cy="0"/>
+        </a:xfrm>
+      </p:grpSpPr>
+      <p:sp>
+        <p:nvSpPr>
+          <p:cNvPr id="3" name="Объект 2"/>
+          <p:cNvSpPr>
+            <a:spLocks noGrp="1"/>
+          </p:cNvSpPr>
+          <p:nvPr>
+            <p:ph idx="1"/>
+          </p:nvPr>
+        </p:nvSpPr>
+        <p:spPr>
+          <a:xfrm>
+            <a:off x="723516" y="849026"/>
+            <a:ext cx="8596668" cy="3880773"/>
+          </a:xfrm>
+        </p:spPr>
+        <p:txBody>
+          <a:bodyPr/>
+          <a:lstStyle/>
+          <a:p>
+            <a:pPr marL="0" indent="0">
+              <a:buNone/>
+            </a:pPr>
+            <a:r>
+              <a:rPr lang="en-US" dirty="0" smtClean="0"/>
+              <a:t>emotion_detector.py</a:t>
+            </a:r>
+            <a:endParaRPr lang="ru-RU" dirty="0"/>
+          </a:p>
+        </p:txBody>
+      </p:sp>
+      <p:pic>
+        <p:nvPicPr>
+          <p:cNvPr id="7" name="Рисунок 6"/>
+          <p:cNvPicPr>
+            <a:picLocks noChangeAspect="1"/>
+          </p:cNvPicPr>
+          <p:nvPr/>
+        </p:nvPicPr>
+        <p:blipFill>
+          <a:blip r:embed="rId2"/>
+          <a:stretch>
+            <a:fillRect/>
+          </a:stretch>
+        </p:blipFill>
+        <p:spPr>
+          <a:xfrm>
+            <a:off x="0" y="2240233"/>
+            <a:ext cx="9897856" cy="4372585"/>
+          </a:xfrm>
+          <a:prstGeom prst="rect">
+            <a:avLst/>
+          </a:prstGeom>
+        </p:spPr>
+      </p:pic>
+    </p:spTree>
+    <p:extLst>
+      <p:ext uri="{BB962C8B-B14F-4D97-AF65-F5344CB8AC3E}">
+        <p14:creationId xmlns:p14="http://schemas.microsoft.com/office/powerpoint/2010/main" val="1731209726"/>
+      </p:ext>
+    </p:extLst>
+  </p:cSld>
+  <p:clrMapOvr>
+    <a:masterClrMapping/>
+  </p:clrMapOvr>
+</p:sld>
+</file>
+
+<file path=ppt/slides/slide8.xml><?xml version="1.0" encoding="utf-8"?>
+<p:sld xmlns:a="http://schemas.openxmlformats.org/drawingml/2006/main" xmlns:r="http://schemas.openxmlformats.org/officeDocument/2006/relationships" xmlns:p="http://schemas.openxmlformats.org/presentationml/2006/main">
+  <p:cSld>
+    <p:spTree>
+      <p:nvGrpSpPr>
+        <p:cNvPr id="1" name=""/>
+        <p:cNvGrpSpPr/>
+        <p:nvPr/>
+      </p:nvGrpSpPr>
+      <p:grpSpPr>
+        <a:xfrm>
+          <a:off x="0" y="0"/>
+          <a:ext cx="0" cy="0"/>
+          <a:chOff x="0" y="0"/>
+          <a:chExt cx="0" cy="0"/>
+        </a:xfrm>
+      </p:grpSpPr>
+      <p:pic>
+        <p:nvPicPr>
+          <p:cNvPr id="4" name="Рисунок 3"/>
+          <p:cNvPicPr>
+            <a:picLocks noChangeAspect="1"/>
+          </p:cNvPicPr>
+          <p:nvPr/>
+        </p:nvPicPr>
+        <p:blipFill>
+          <a:blip r:embed="rId2"/>
+          <a:stretch>
+            <a:fillRect/>
+          </a:stretch>
+        </p:blipFill>
+        <p:spPr>
+          <a:xfrm>
+            <a:off x="0" y="609600"/>
+            <a:ext cx="11288700" cy="5496692"/>
+          </a:xfrm>
+          <a:prstGeom prst="rect">
+            <a:avLst/>
+          </a:prstGeom>
+        </p:spPr>
+      </p:pic>
+    </p:spTree>
+    <p:extLst>
+      <p:ext uri="{BB962C8B-B14F-4D97-AF65-F5344CB8AC3E}">
+        <p14:creationId xmlns:p14="http://schemas.microsoft.com/office/powerpoint/2010/main" val="1432101464"/>
+      </p:ext>
+    </p:extLst>
+  </p:cSld>
+  <p:clrMapOvr>
+    <a:masterClrMapping/>
+  </p:clrMapOvr>
+</p:sld>
+</file>
+
 <file path=ppt/slides/slide9.xml><?xml version="1.0" encoding="utf-8"?>
 <p:sld xmlns:a="http://schemas.openxmlformats.org/drawingml/2006/main" xmlns:r="http://schemas.openxmlformats.org/officeDocument/2006/relationships" xmlns:p="http://schemas.openxmlformats.org/presentationml/2006/main">
   <p:cSld>
@@ -6591,7 +6848,7 @@
             <a:spLocks noGrp="1"/>
           </p:cNvSpPr>
           <p:nvPr>
-            <p:ph type="ctrTitle"/>
+            <p:ph type="title"/>
           </p:nvPr>
         </p:nvSpPr>
         <p:spPr/>
@@ -6600,8 +6857,8 @@
           <a:lstStyle/>
           <a:p>
             <a:r>
-              <a:rPr lang="en-US" dirty="0" smtClean="0"/>
-              <a:t>Emotion detector project</a:t>
+              <a:rPr lang="ru-RU" dirty="0" smtClean="0"/>
+              <a:t>Примеры работы</a:t>
             </a:r>
             <a:endParaRPr lang="ru-RU" dirty="0"/>
           </a:p>
@@ -6609,12 +6866,12 @@
       </p:sp>
       <p:sp>
         <p:nvSpPr>
-          <p:cNvPr id="3" name="Подзаголовок 2"/>
-          <p:cNvSpPr>
-            <a:spLocks noGrp="1"/>
-          </p:cNvSpPr>
-          <p:nvPr>
-            <p:ph type="subTitle" idx="1"/>
+          <p:cNvPr id="3" name="Объект 2"/>
+          <p:cNvSpPr>
+            <a:spLocks noGrp="1"/>
+          </p:cNvSpPr>
+          <p:nvPr>
+            <p:ph idx="1"/>
           </p:nvPr>
         </p:nvSpPr>
         <p:spPr/>
@@ -6622,26 +6879,62 @@
           <a:bodyPr/>
           <a:lstStyle/>
           <a:p>
-            <a:r>
-              <a:rPr lang="ru-RU" dirty="0" smtClean="0"/>
-              <a:t>Мухаметшин Дамир, БЦМТ242 </a:t>
-            </a:r>
-            <a:r>
-              <a:rPr lang="ru-RU" dirty="0" err="1" smtClean="0"/>
-              <a:t>Матфак</a:t>
-            </a:r>
-            <a:r>
-              <a:rPr lang="ru-RU" dirty="0" smtClean="0"/>
-              <a:t> ВШЭ</a:t>
-            </a:r>
-            <a:endParaRPr lang="ru-RU" dirty="0"/>
-          </a:p>
-        </p:txBody>
-      </p:sp>
+            <a:endParaRPr lang="ru-RU"/>
+          </a:p>
+        </p:txBody>
+      </p:sp>
+      <p:pic>
+        <p:nvPicPr>
+          <p:cNvPr id="4" name="Рисунок 3"/>
+          <p:cNvPicPr>
+            <a:picLocks noChangeAspect="1"/>
+          </p:cNvPicPr>
+          <p:nvPr/>
+        </p:nvPicPr>
+        <p:blipFill>
+          <a:blip r:embed="rId2"/>
+          <a:stretch>
+            <a:fillRect/>
+          </a:stretch>
+        </p:blipFill>
+        <p:spPr>
+          <a:xfrm>
+            <a:off x="0" y="1736436"/>
+            <a:ext cx="6107459" cy="4892121"/>
+          </a:xfrm>
+          <a:prstGeom prst="rect">
+            <a:avLst/>
+          </a:prstGeom>
+        </p:spPr>
+      </p:pic>
+      <p:pic>
+        <p:nvPicPr>
+          <p:cNvPr id="5" name="Рисунок 4"/>
+          <p:cNvPicPr>
+            <a:picLocks noChangeAspect="1"/>
+          </p:cNvPicPr>
+          <p:nvPr/>
+        </p:nvPicPr>
+        <p:blipFill>
+          <a:blip r:embed="rId3"/>
+          <a:stretch>
+            <a:fillRect/>
+          </a:stretch>
+        </p:blipFill>
+        <p:spPr>
+          <a:xfrm>
+            <a:off x="6180662" y="1736436"/>
+            <a:ext cx="6107981" cy="4792534"/>
+          </a:xfrm>
+          <a:prstGeom prst="rect">
+            <a:avLst/>
+          </a:prstGeom>
+        </p:spPr>
+      </p:pic>
     </p:spTree>
     <p:extLst>
       <p:ext uri="{BB962C8B-B14F-4D97-AF65-F5344CB8AC3E}">
-        <p14:creationId xmlns:p14="http://schemas.microsoft.com/office/powerpoint/2010/main" val="3048669636"/>
+        <p14:creationId xmlns:p14="http://schemas.microsoft.com/office/powerpoint/2010/main" val="2494730592"/>
       </p:ext>
     </p:extLst>
   </p:cSld>
